--- a/livro_ia_educacao/saida/pptx/Cap27_slides.pptx
+++ b/livro_ia_educacao/saida/pptx/Cap27_slides.pptx
@@ -10082,11 +10082,11 @@
         <p:spPr>
           <a:xfrm>
             <a:off x="548640" y="1417320"/>
-            <a:ext cx="11064240" cy="762000"/>
+            <a:ext cx="11064240" cy="682752"/>
           </a:xfrm>
           <a:prstGeom prst="roundRect">
             <a:avLst>
-              <a:gd name="adj" fmla="val 14400"/>
+              <a:gd name="adj" fmla="val 16071"/>
             </a:avLst>
           </a:prstGeom>
           <a:solidFill>
@@ -10113,7 +10113,7 @@
         <p:spPr>
           <a:xfrm>
             <a:off x="731520" y="1417320"/>
-            <a:ext cx="548640" cy="762000"/>
+            <a:ext cx="548640" cy="682752"/>
           </a:xfrm>
           <a:prstGeom prst="rect">
             <a:avLst/>
@@ -10149,7 +10149,7 @@
         <p:spPr>
           <a:xfrm>
             <a:off x="1463040" y="1417320"/>
-            <a:ext cx="9966960" cy="762000"/>
+            <a:ext cx="9966960" cy="682752"/>
           </a:xfrm>
           <a:prstGeom prst="rect">
             <a:avLst/>
@@ -10184,12 +10184,12 @@
         </p:nvSpPr>
         <p:spPr>
           <a:xfrm>
-            <a:off x="548640" y="2289048"/>
-            <a:ext cx="11064240" cy="762000"/>
+            <a:off x="548640" y="2209800"/>
+            <a:ext cx="11064240" cy="682752"/>
           </a:xfrm>
           <a:prstGeom prst="roundRect">
             <a:avLst>
-              <a:gd name="adj" fmla="val 14400"/>
+              <a:gd name="adj" fmla="val 16071"/>
             </a:avLst>
           </a:prstGeom>
           <a:solidFill>
@@ -10215,8 +10215,8 @@
         </p:nvSpPr>
         <p:spPr>
           <a:xfrm>
-            <a:off x="731520" y="2289048"/>
-            <a:ext cx="548640" cy="762000"/>
+            <a:off x="731520" y="2209800"/>
+            <a:ext cx="548640" cy="682752"/>
           </a:xfrm>
           <a:prstGeom prst="rect">
             <a:avLst/>
@@ -10251,8 +10251,8 @@
         </p:nvSpPr>
         <p:spPr>
           <a:xfrm>
-            <a:off x="1463040" y="2289048"/>
-            <a:ext cx="9966960" cy="762000"/>
+            <a:off x="1463040" y="2209800"/>
+            <a:ext cx="9966960" cy="682752"/>
           </a:xfrm>
           <a:prstGeom prst="rect">
             <a:avLst/>
@@ -10287,12 +10287,12 @@
         </p:nvSpPr>
         <p:spPr>
           <a:xfrm>
-            <a:off x="548640" y="3160776"/>
-            <a:ext cx="11064240" cy="762000"/>
+            <a:off x="548640" y="3002280"/>
+            <a:ext cx="11064240" cy="682752"/>
           </a:xfrm>
           <a:prstGeom prst="roundRect">
             <a:avLst>
-              <a:gd name="adj" fmla="val 14400"/>
+              <a:gd name="adj" fmla="val 16071"/>
             </a:avLst>
           </a:prstGeom>
           <a:solidFill>
@@ -10318,8 +10318,8 @@
         </p:nvSpPr>
         <p:spPr>
           <a:xfrm>
-            <a:off x="731520" y="3160776"/>
-            <a:ext cx="548640" cy="762000"/>
+            <a:off x="731520" y="3002280"/>
+            <a:ext cx="548640" cy="682752"/>
           </a:xfrm>
           <a:prstGeom prst="rect">
             <a:avLst/>
@@ -10354,8 +10354,8 @@
         </p:nvSpPr>
         <p:spPr>
           <a:xfrm>
-            <a:off x="1463040" y="3160776"/>
-            <a:ext cx="9966960" cy="762000"/>
+            <a:off x="1463040" y="3002280"/>
+            <a:ext cx="9966960" cy="682752"/>
           </a:xfrm>
           <a:prstGeom prst="rect">
             <a:avLst/>
@@ -10390,12 +10390,12 @@
         </p:nvSpPr>
         <p:spPr>
           <a:xfrm>
-            <a:off x="548640" y="4032504"/>
-            <a:ext cx="11064240" cy="762000"/>
+            <a:off x="548640" y="3794760"/>
+            <a:ext cx="11064240" cy="682752"/>
           </a:xfrm>
           <a:prstGeom prst="roundRect">
             <a:avLst>
-              <a:gd name="adj" fmla="val 14400"/>
+              <a:gd name="adj" fmla="val 16071"/>
             </a:avLst>
           </a:prstGeom>
           <a:solidFill>
@@ -10421,8 +10421,8 @@
         </p:nvSpPr>
         <p:spPr>
           <a:xfrm>
-            <a:off x="731520" y="4032504"/>
-            <a:ext cx="548640" cy="762000"/>
+            <a:off x="731520" y="3794760"/>
+            <a:ext cx="548640" cy="682752"/>
           </a:xfrm>
           <a:prstGeom prst="rect">
             <a:avLst/>
@@ -10457,8 +10457,8 @@
         </p:nvSpPr>
         <p:spPr>
           <a:xfrm>
-            <a:off x="1463040" y="4032504"/>
-            <a:ext cx="9966960" cy="762000"/>
+            <a:off x="1463040" y="3794760"/>
+            <a:ext cx="9966960" cy="682752"/>
           </a:xfrm>
           <a:prstGeom prst="rect">
             <a:avLst/>
@@ -10493,12 +10493,12 @@
         </p:nvSpPr>
         <p:spPr>
           <a:xfrm>
-            <a:off x="548640" y="4904232"/>
-            <a:ext cx="11064240" cy="762000"/>
+            <a:off x="548640" y="4587240"/>
+            <a:ext cx="11064240" cy="682752"/>
           </a:xfrm>
           <a:prstGeom prst="roundRect">
             <a:avLst>
-              <a:gd name="adj" fmla="val 14400"/>
+              <a:gd name="adj" fmla="val 16071"/>
             </a:avLst>
           </a:prstGeom>
           <a:solidFill>
@@ -10524,8 +10524,8 @@
         </p:nvSpPr>
         <p:spPr>
           <a:xfrm>
-            <a:off x="731520" y="4904232"/>
-            <a:ext cx="548640" cy="762000"/>
+            <a:off x="731520" y="4587240"/>
+            <a:ext cx="548640" cy="682752"/>
           </a:xfrm>
           <a:prstGeom prst="rect">
             <a:avLst/>
@@ -10560,8 +10560,8 @@
         </p:nvSpPr>
         <p:spPr>
           <a:xfrm>
-            <a:off x="1463040" y="4904232"/>
-            <a:ext cx="9966960" cy="762000"/>
+            <a:off x="1463040" y="4587240"/>
+            <a:ext cx="9966960" cy="682752"/>
           </a:xfrm>
           <a:prstGeom prst="rect">
             <a:avLst/>
@@ -10596,12 +10596,12 @@
         </p:nvSpPr>
         <p:spPr>
           <a:xfrm>
-            <a:off x="548640" y="5775960"/>
-            <a:ext cx="11064240" cy="762000"/>
+            <a:off x="548640" y="5379720"/>
+            <a:ext cx="11064240" cy="682752"/>
           </a:xfrm>
           <a:prstGeom prst="roundRect">
             <a:avLst>
-              <a:gd name="adj" fmla="val 14400"/>
+              <a:gd name="adj" fmla="val 16071"/>
             </a:avLst>
           </a:prstGeom>
           <a:solidFill>
@@ -10627,8 +10627,8 @@
         </p:nvSpPr>
         <p:spPr>
           <a:xfrm>
-            <a:off x="731520" y="5775960"/>
-            <a:ext cx="548640" cy="762000"/>
+            <a:off x="731520" y="5379720"/>
+            <a:ext cx="548640" cy="682752"/>
           </a:xfrm>
           <a:prstGeom prst="rect">
             <a:avLst/>
@@ -10663,8 +10663,8 @@
         </p:nvSpPr>
         <p:spPr>
           <a:xfrm>
-            <a:off x="1463040" y="5775960"/>
-            <a:ext cx="9966960" cy="762000"/>
+            <a:off x="1463040" y="5379720"/>
+            <a:ext cx="9966960" cy="682752"/>
           </a:xfrm>
           <a:prstGeom prst="rect">
             <a:avLst/>
